--- a/docs/pitch.pptx
+++ b/docs/pitch.pptx
@@ -19994,7 +19994,7 @@
                 <a:cs typeface="Songti SC"/>
                 <a:sym typeface="Songti SC"/>
               </a:rPr>
-              <a:t>【队名】【成员】</a:t>
+              <a:t>AI终身合伙人 · 陈敏鸿、秦斌、黄焱豪、邵凡</a:t>
             </a:r>
             <a:endParaRPr lang="en-US" sz="1100"/>
           </a:p>
@@ -20060,30 +20060,6 @@
           </a:p>
         </p:txBody>
       </p:sp>
-      <p:pic>
-        <p:nvPicPr>
-          <p:cNvPr name="Picture 7" id="7"/>
-          <p:cNvPicPr>
-            <a:picLocks noChangeAspect="true"/>
-          </p:cNvPicPr>
-          <p:nvPr/>
-        </p:nvPicPr>
-        <p:blipFill>
-          <a:blip r:embed="rId2"/>
-          <a:stretch>
-            <a:fillRect/>
-          </a:stretch>
-        </p:blipFill>
-        <p:spPr>
-          <a:xfrm>
-            <a:off x="10656888" y="6318812"/>
-            <a:ext cx="1522412" cy="539188"/>
-          </a:xfrm>
-          <a:prstGeom prst="rect">
-            <a:avLst/>
-          </a:prstGeom>
-        </p:spPr>
-      </p:pic>
     </p:spTree>
   </p:cSld>
   <p:clrMapOvr>
